--- a/level2/course1.pptx
+++ b/level2/course1.pptx
@@ -5,11 +5,17 @@
     <p:sldMasterId id="2147483825" r:id="rId1"/>
   </p:sldMasterIdLst>
   <p:notesMasterIdLst>
-    <p:notesMasterId r:id="rId4"/>
+    <p:notesMasterId r:id="rId10"/>
   </p:notesMasterIdLst>
   <p:sldIdLst>
     <p:sldId id="256" r:id="rId2"/>
-    <p:sldId id="279" r:id="rId3"/>
+    <p:sldId id="285" r:id="rId3"/>
+    <p:sldId id="284" r:id="rId4"/>
+    <p:sldId id="283" r:id="rId5"/>
+    <p:sldId id="279" r:id="rId6"/>
+    <p:sldId id="282" r:id="rId7"/>
+    <p:sldId id="280" r:id="rId8"/>
+    <p:sldId id="281" r:id="rId9"/>
   </p:sldIdLst>
   <p:sldSz cx="9144000" cy="5143500" type="screen16x9"/>
   <p:notesSz cx="6858000" cy="9144000"/>
@@ -198,7 +204,7 @@
           <a:p>
             <a:fld id="{B157FD80-104E-477A-84DF-AAA7C9A1979B}" type="datetimeFigureOut">
               <a:rPr lang="en-ZA" smtClean="0"/>
-              <a:t>2026/06/19</a:t>
+              <a:t>2026/07/11</a:t>
             </a:fld>
             <a:endParaRPr lang="en-ZA"/>
           </a:p>
@@ -615,7 +621,7 @@
           <a:p>
             <a:fld id="{8353421B-4862-4D3A-B9AB-BA663EF3CA0D}" type="datetimeFigureOut">
               <a:rPr lang="en-ZA" smtClean="0"/>
-              <a:t>2026/06/19</a:t>
+              <a:t>2026/07/11</a:t>
             </a:fld>
             <a:endParaRPr lang="en-ZA"/>
           </a:p>
@@ -815,7 +821,7 @@
           <a:p>
             <a:fld id="{8353421B-4862-4D3A-B9AB-BA663EF3CA0D}" type="datetimeFigureOut">
               <a:rPr lang="en-ZA" smtClean="0"/>
-              <a:t>2026/06/19</a:t>
+              <a:t>2026/07/11</a:t>
             </a:fld>
             <a:endParaRPr lang="en-ZA"/>
           </a:p>
@@ -1025,7 +1031,7 @@
           <a:p>
             <a:fld id="{8353421B-4862-4D3A-B9AB-BA663EF3CA0D}" type="datetimeFigureOut">
               <a:rPr lang="en-ZA" smtClean="0"/>
-              <a:t>2026/06/19</a:t>
+              <a:t>2026/07/11</a:t>
             </a:fld>
             <a:endParaRPr lang="en-ZA"/>
           </a:p>
@@ -1506,7 +1512,7 @@
           <a:p>
             <a:fld id="{8353421B-4862-4D3A-B9AB-BA663EF3CA0D}" type="datetimeFigureOut">
               <a:rPr lang="en-ZA" smtClean="0"/>
-              <a:t>2026/06/19</a:t>
+              <a:t>2026/07/11</a:t>
             </a:fld>
             <a:endParaRPr lang="en-ZA"/>
           </a:p>
@@ -1782,7 +1788,7 @@
           <a:p>
             <a:fld id="{8353421B-4862-4D3A-B9AB-BA663EF3CA0D}" type="datetimeFigureOut">
               <a:rPr lang="en-ZA" smtClean="0"/>
-              <a:t>2026/06/19</a:t>
+              <a:t>2026/07/11</a:t>
             </a:fld>
             <a:endParaRPr lang="en-ZA"/>
           </a:p>
@@ -2050,7 +2056,7 @@
           <a:p>
             <a:fld id="{8353421B-4862-4D3A-B9AB-BA663EF3CA0D}" type="datetimeFigureOut">
               <a:rPr lang="en-ZA" smtClean="0"/>
-              <a:t>2026/06/19</a:t>
+              <a:t>2026/07/11</a:t>
             </a:fld>
             <a:endParaRPr lang="en-ZA"/>
           </a:p>
@@ -2465,7 +2471,7 @@
           <a:p>
             <a:fld id="{8353421B-4862-4D3A-B9AB-BA663EF3CA0D}" type="datetimeFigureOut">
               <a:rPr lang="en-ZA" smtClean="0"/>
-              <a:t>2026/06/19</a:t>
+              <a:t>2026/07/11</a:t>
             </a:fld>
             <a:endParaRPr lang="en-ZA"/>
           </a:p>
@@ -2607,7 +2613,7 @@
           <a:p>
             <a:fld id="{8353421B-4862-4D3A-B9AB-BA663EF3CA0D}" type="datetimeFigureOut">
               <a:rPr lang="en-ZA" smtClean="0"/>
-              <a:t>2026/06/19</a:t>
+              <a:t>2026/07/11</a:t>
             </a:fld>
             <a:endParaRPr lang="en-ZA"/>
           </a:p>
@@ -2720,7 +2726,7 @@
           <a:p>
             <a:fld id="{8353421B-4862-4D3A-B9AB-BA663EF3CA0D}" type="datetimeFigureOut">
               <a:rPr lang="en-ZA" smtClean="0"/>
-              <a:t>2026/06/19</a:t>
+              <a:t>2026/07/11</a:t>
             </a:fld>
             <a:endParaRPr lang="en-ZA"/>
           </a:p>
@@ -3033,7 +3039,7 @@
           <a:p>
             <a:fld id="{8353421B-4862-4D3A-B9AB-BA663EF3CA0D}" type="datetimeFigureOut">
               <a:rPr lang="en-ZA" smtClean="0"/>
-              <a:t>2026/06/19</a:t>
+              <a:t>2026/07/11</a:t>
             </a:fld>
             <a:endParaRPr lang="en-ZA"/>
           </a:p>
@@ -3322,7 +3328,7 @@
           <a:p>
             <a:fld id="{8353421B-4862-4D3A-B9AB-BA663EF3CA0D}" type="datetimeFigureOut">
               <a:rPr lang="en-ZA" smtClean="0"/>
-              <a:t>2026/06/19</a:t>
+              <a:t>2026/07/11</a:t>
             </a:fld>
             <a:endParaRPr lang="en-ZA"/>
           </a:p>
@@ -3575,7 +3581,7 @@
           <a:p>
             <a:fld id="{8353421B-4862-4D3A-B9AB-BA663EF3CA0D}" type="datetimeFigureOut">
               <a:rPr lang="en-ZA" smtClean="0"/>
-              <a:t>2026/06/19</a:t>
+              <a:t>2026/07/11</a:t>
             </a:fld>
             <a:endParaRPr lang="en-ZA"/>
           </a:p>
@@ -4040,10 +4046,10 @@
       </p:sp>
       <p:pic>
         <p:nvPicPr>
-          <p:cNvPr id="4" name="Picture 3">
-            <a:extLst>
-              <a:ext uri="{FF2B5EF4-FFF2-40B4-BE49-F238E27FC236}">
-                <a16:creationId xmlns:a16="http://schemas.microsoft.com/office/drawing/2014/main" id="{1DC2ABBC-EDAF-BC7E-4C08-81CF758A5285}"/>
+          <p:cNvPr id="5" name="Image 4">
+            <a:extLst>
+              <a:ext uri="{FF2B5EF4-FFF2-40B4-BE49-F238E27FC236}">
+                <a16:creationId xmlns:a16="http://schemas.microsoft.com/office/drawing/2014/main" id="{749E02D1-8631-4D99-AA6C-8CEFA6ED14FC}"/>
               </a:ext>
             </a:extLst>
           </p:cNvPr>
@@ -4054,15 +4060,14 @@
         </p:nvPicPr>
         <p:blipFill>
           <a:blip r:embed="rId2"/>
-          <a:srcRect b="16322"/>
           <a:stretch>
             <a:fillRect/>
           </a:stretch>
         </p:blipFill>
         <p:spPr>
           <a:xfrm>
-            <a:off x="1" y="0"/>
-            <a:ext cx="9144000" cy="5048042"/>
+            <a:off x="0" y="1"/>
+            <a:ext cx="9144000" cy="5143500"/>
           </a:xfrm>
           <a:prstGeom prst="rect">
             <a:avLst/>
@@ -4094,10 +4099,754 @@
           <a:chExt cx="0" cy="0"/>
         </a:xfrm>
       </p:grpSpPr>
+      <p:pic>
+        <p:nvPicPr>
+          <p:cNvPr id="2" name="Image 1">
+            <a:extLst>
+              <a:ext uri="{FF2B5EF4-FFF2-40B4-BE49-F238E27FC236}">
+                <a16:creationId xmlns:a16="http://schemas.microsoft.com/office/drawing/2014/main" id="{F2A4E54E-AF0F-4679-9933-3F43E3CF2780}"/>
+              </a:ext>
+            </a:extLst>
+          </p:cNvPr>
+          <p:cNvPicPr>
+            <a:picLocks noChangeAspect="1"/>
+          </p:cNvPicPr>
+          <p:nvPr/>
+        </p:nvPicPr>
+        <p:blipFill>
+          <a:blip r:embed="rId2"/>
+          <a:stretch>
+            <a:fillRect/>
+          </a:stretch>
+        </p:blipFill>
+        <p:spPr>
+          <a:xfrm>
+            <a:off x="1553908" y="372165"/>
+            <a:ext cx="3858919" cy="4399170"/>
+          </a:xfrm>
+          <a:prstGeom prst="rect">
+            <a:avLst/>
+          </a:prstGeom>
+          <a:ln>
+            <a:noFill/>
+          </a:ln>
+          <a:effectLst>
+            <a:outerShdw blurRad="292100" dist="139700" dir="2700000" algn="tl" rotWithShape="0">
+              <a:srgbClr val="333333">
+                <a:alpha val="65000"/>
+              </a:srgbClr>
+            </a:outerShdw>
+          </a:effectLst>
+        </p:spPr>
+      </p:pic>
+    </p:spTree>
+    <p:extLst>
+      <p:ext uri="{BB962C8B-B14F-4D97-AF65-F5344CB8AC3E}">
+        <p14:creationId xmlns:p14="http://schemas.microsoft.com/office/powerpoint/2010/main" val="887876318"/>
+      </p:ext>
+    </p:extLst>
+  </p:cSld>
+  <p:clrMapOvr>
+    <a:masterClrMapping/>
+  </p:clrMapOvr>
+</p:sld>
+</file>
+
+<file path=ppt/slides/slide3.xml><?xml version="1.0" encoding="utf-8"?>
+<p:sld xmlns:a="http://schemas.openxmlformats.org/drawingml/2006/main" xmlns:r="http://schemas.openxmlformats.org/officeDocument/2006/relationships" xmlns:p="http://schemas.openxmlformats.org/presentationml/2006/main">
+  <p:cSld>
+    <p:spTree>
+      <p:nvGrpSpPr>
+        <p:cNvPr id="1" name=""/>
+        <p:cNvGrpSpPr/>
+        <p:nvPr/>
+      </p:nvGrpSpPr>
+      <p:grpSpPr>
+        <a:xfrm>
+          <a:off x="0" y="0"/>
+          <a:ext cx="0" cy="0"/>
+          <a:chOff x="0" y="0"/>
+          <a:chExt cx="0" cy="0"/>
+        </a:xfrm>
+      </p:grpSpPr>
+      <p:pic>
+        <p:nvPicPr>
+          <p:cNvPr id="5" name="Image 4">
+            <a:extLst>
+              <a:ext uri="{FF2B5EF4-FFF2-40B4-BE49-F238E27FC236}">
+                <a16:creationId xmlns:a16="http://schemas.microsoft.com/office/drawing/2014/main" id="{58F29AD8-0451-4AAA-A35B-81CA6EB9849F}"/>
+              </a:ext>
+            </a:extLst>
+          </p:cNvPr>
+          <p:cNvPicPr>
+            <a:picLocks noChangeAspect="1"/>
+          </p:cNvPicPr>
+          <p:nvPr/>
+        </p:nvPicPr>
+        <p:blipFill>
+          <a:blip r:embed="rId2"/>
+          <a:stretch>
+            <a:fillRect/>
+          </a:stretch>
+        </p:blipFill>
+        <p:spPr>
+          <a:xfrm>
+            <a:off x="572816" y="356996"/>
+            <a:ext cx="3251822" cy="4429508"/>
+          </a:xfrm>
+          <a:prstGeom prst="rect">
+            <a:avLst/>
+          </a:prstGeom>
+          <a:ln>
+            <a:noFill/>
+          </a:ln>
+          <a:effectLst>
+            <a:outerShdw blurRad="292100" dist="139700" dir="2700000" algn="tl" rotWithShape="0">
+              <a:srgbClr val="333333">
+                <a:alpha val="65000"/>
+              </a:srgbClr>
+            </a:outerShdw>
+          </a:effectLst>
+        </p:spPr>
+      </p:pic>
+      <p:pic>
+        <p:nvPicPr>
+          <p:cNvPr id="6" name="Image 5">
+            <a:extLst>
+              <a:ext uri="{FF2B5EF4-FFF2-40B4-BE49-F238E27FC236}">
+                <a16:creationId xmlns:a16="http://schemas.microsoft.com/office/drawing/2014/main" id="{AAE45198-F97B-43D1-BDB5-47F427A4881F}"/>
+              </a:ext>
+            </a:extLst>
+          </p:cNvPr>
+          <p:cNvPicPr>
+            <a:picLocks noChangeAspect="1"/>
+          </p:cNvPicPr>
+          <p:nvPr/>
+        </p:nvPicPr>
+        <p:blipFill>
+          <a:blip r:embed="rId3"/>
+          <a:stretch>
+            <a:fillRect/>
+          </a:stretch>
+        </p:blipFill>
+        <p:spPr>
+          <a:xfrm>
+            <a:off x="4572000" y="356996"/>
+            <a:ext cx="3541986" cy="4429508"/>
+          </a:xfrm>
+          <a:prstGeom prst="rect">
+            <a:avLst/>
+          </a:prstGeom>
+          <a:ln>
+            <a:noFill/>
+          </a:ln>
+          <a:effectLst>
+            <a:outerShdw blurRad="292100" dist="139700" dir="2700000" algn="tl" rotWithShape="0">
+              <a:srgbClr val="333333">
+                <a:alpha val="65000"/>
+              </a:srgbClr>
+            </a:outerShdw>
+          </a:effectLst>
+        </p:spPr>
+      </p:pic>
+    </p:spTree>
+    <p:extLst>
+      <p:ext uri="{BB962C8B-B14F-4D97-AF65-F5344CB8AC3E}">
+        <p14:creationId xmlns:p14="http://schemas.microsoft.com/office/powerpoint/2010/main" val="3751163626"/>
+      </p:ext>
+    </p:extLst>
+  </p:cSld>
+  <p:clrMapOvr>
+    <a:masterClrMapping/>
+  </p:clrMapOvr>
+</p:sld>
+</file>
+
+<file path=ppt/slides/slide4.xml><?xml version="1.0" encoding="utf-8"?>
+<p:sld xmlns:a="http://schemas.openxmlformats.org/drawingml/2006/main" xmlns:r="http://schemas.openxmlformats.org/officeDocument/2006/relationships" xmlns:p="http://schemas.openxmlformats.org/presentationml/2006/main">
+  <p:cSld>
+    <p:spTree>
+      <p:nvGrpSpPr>
+        <p:cNvPr id="1" name=""/>
+        <p:cNvGrpSpPr/>
+        <p:nvPr/>
+      </p:nvGrpSpPr>
+      <p:grpSpPr>
+        <a:xfrm>
+          <a:off x="0" y="0"/>
+          <a:ext cx="0" cy="0"/>
+          <a:chOff x="0" y="0"/>
+          <a:chExt cx="0" cy="0"/>
+        </a:xfrm>
+      </p:grpSpPr>
+      <p:pic>
+        <p:nvPicPr>
+          <p:cNvPr id="6" name="Image 5">
+            <a:extLst>
+              <a:ext uri="{FF2B5EF4-FFF2-40B4-BE49-F238E27FC236}">
+                <a16:creationId xmlns:a16="http://schemas.microsoft.com/office/drawing/2014/main" id="{990035F9-A145-4534-8144-F7ECD83FBF35}"/>
+              </a:ext>
+            </a:extLst>
+          </p:cNvPr>
+          <p:cNvPicPr>
+            <a:picLocks noChangeAspect="1"/>
+          </p:cNvPicPr>
+          <p:nvPr/>
+        </p:nvPicPr>
+        <p:blipFill>
+          <a:blip r:embed="rId2"/>
+          <a:stretch>
+            <a:fillRect/>
+          </a:stretch>
+        </p:blipFill>
+        <p:spPr>
+          <a:xfrm>
+            <a:off x="0" y="49113"/>
+            <a:ext cx="9144000" cy="5045273"/>
+          </a:xfrm>
+          <a:prstGeom prst="rect">
+            <a:avLst/>
+          </a:prstGeom>
+        </p:spPr>
+      </p:pic>
+    </p:spTree>
+    <p:extLst>
+      <p:ext uri="{BB962C8B-B14F-4D97-AF65-F5344CB8AC3E}">
+        <p14:creationId xmlns:p14="http://schemas.microsoft.com/office/powerpoint/2010/main" val="1529476112"/>
+      </p:ext>
+    </p:extLst>
+  </p:cSld>
+  <p:clrMapOvr>
+    <a:masterClrMapping/>
+  </p:clrMapOvr>
+</p:sld>
+</file>
+
+<file path=ppt/slides/slide5.xml><?xml version="1.0" encoding="utf-8"?>
+<p:sld xmlns:a="http://schemas.openxmlformats.org/drawingml/2006/main" xmlns:r="http://schemas.openxmlformats.org/officeDocument/2006/relationships" xmlns:p="http://schemas.openxmlformats.org/presentationml/2006/main">
+  <p:cSld>
+    <p:spTree>
+      <p:nvGrpSpPr>
+        <p:cNvPr id="1" name=""/>
+        <p:cNvGrpSpPr/>
+        <p:nvPr/>
+      </p:nvGrpSpPr>
+      <p:grpSpPr>
+        <a:xfrm>
+          <a:off x="0" y="0"/>
+          <a:ext cx="0" cy="0"/>
+          <a:chOff x="0" y="0"/>
+          <a:chExt cx="0" cy="0"/>
+        </a:xfrm>
+      </p:grpSpPr>
+      <p:sp>
+        <p:nvSpPr>
+          <p:cNvPr id="2" name="Rectangle 1">
+            <a:extLst>
+              <a:ext uri="{FF2B5EF4-FFF2-40B4-BE49-F238E27FC236}">
+                <a16:creationId xmlns:a16="http://schemas.microsoft.com/office/drawing/2014/main" id="{23BCBD55-5E4A-4E9E-AA8C-605149E7FBB0}"/>
+              </a:ext>
+            </a:extLst>
+          </p:cNvPr>
+          <p:cNvSpPr/>
+          <p:nvPr/>
+        </p:nvSpPr>
+        <p:spPr>
+          <a:xfrm>
+            <a:off x="566485" y="659323"/>
+            <a:ext cx="2462534" cy="461665"/>
+          </a:xfrm>
+          <a:prstGeom prst="rect">
+            <a:avLst/>
+          </a:prstGeom>
+        </p:spPr>
+        <p:txBody>
+          <a:bodyPr wrap="none">
+            <a:spAutoFit/>
+          </a:bodyPr>
+          <a:lstStyle/>
+          <a:p>
+            <a:r>
+              <a:rPr lang="en-US" sz="2400" b="1" dirty="0"/>
+              <a:t>GUI Programming</a:t>
+            </a:r>
+          </a:p>
+        </p:txBody>
+      </p:sp>
+      <p:sp>
+        <p:nvSpPr>
+          <p:cNvPr id="3" name="Rectangle 2">
+            <a:extLst>
+              <a:ext uri="{FF2B5EF4-FFF2-40B4-BE49-F238E27FC236}">
+                <a16:creationId xmlns:a16="http://schemas.microsoft.com/office/drawing/2014/main" id="{5F431E32-07B0-462A-9070-EE7FA031BCC3}"/>
+              </a:ext>
+            </a:extLst>
+          </p:cNvPr>
+          <p:cNvSpPr/>
+          <p:nvPr/>
+        </p:nvSpPr>
+        <p:spPr>
+          <a:xfrm>
+            <a:off x="641596" y="1083778"/>
+            <a:ext cx="8118457" cy="1200329"/>
+          </a:xfrm>
+          <a:prstGeom prst="rect">
+            <a:avLst/>
+          </a:prstGeom>
+        </p:spPr>
+        <p:txBody>
+          <a:bodyPr wrap="square">
+            <a:spAutoFit/>
+          </a:bodyPr>
+          <a:lstStyle/>
+          <a:p>
+            <a:r>
+              <a:rPr lang="en-US" b="1" dirty="0"/>
+              <a:t>GUI</a:t>
+            </a:r>
+            <a:r>
+              <a:rPr lang="en-US" dirty="0"/>
+              <a:t> stands for </a:t>
+            </a:r>
+            <a:r>
+              <a:rPr lang="en-US" b="1" dirty="0"/>
+              <a:t>Graphical User Interface</a:t>
+            </a:r>
+            <a:r>
+              <a:rPr lang="en-US" dirty="0"/>
+              <a:t>.</a:t>
+            </a:r>
+          </a:p>
+          <a:p>
+            <a:r>
+              <a:rPr lang="en-US" dirty="0"/>
+              <a:t>A GUI is a visual interface that allows users to interact with a program using graphical elements instead of </a:t>
+            </a:r>
+            <a:r>
+              <a:rPr lang="en-US" b="1" dirty="0"/>
+              <a:t>typing commands. </a:t>
+            </a:r>
+          </a:p>
+          <a:p>
+            <a:pPr lvl="1"/>
+            <a:endParaRPr lang="en-US" dirty="0"/>
+          </a:p>
+        </p:txBody>
+      </p:sp>
+      <p:sp>
+        <p:nvSpPr>
+          <p:cNvPr id="4" name="Rectangle 3">
+            <a:extLst>
+              <a:ext uri="{FF2B5EF4-FFF2-40B4-BE49-F238E27FC236}">
+                <a16:creationId xmlns:a16="http://schemas.microsoft.com/office/drawing/2014/main" id="{6108712E-0771-45A9-B14D-57A861D22F8D}"/>
+              </a:ext>
+            </a:extLst>
+          </p:cNvPr>
+          <p:cNvSpPr/>
+          <p:nvPr/>
+        </p:nvSpPr>
+        <p:spPr>
+          <a:xfrm>
+            <a:off x="615321" y="2304414"/>
+            <a:ext cx="3020379" cy="369332"/>
+          </a:xfrm>
+          <a:prstGeom prst="rect">
+            <a:avLst/>
+          </a:prstGeom>
+        </p:spPr>
+        <p:txBody>
+          <a:bodyPr wrap="none">
+            <a:spAutoFit/>
+          </a:bodyPr>
+          <a:lstStyle/>
+          <a:p>
+            <a:r>
+              <a:rPr lang="en-US" b="1" dirty="0"/>
+              <a:t>CLI (Command-Line Interface)</a:t>
+            </a:r>
+          </a:p>
+        </p:txBody>
+      </p:sp>
+      <p:sp>
+        <p:nvSpPr>
+          <p:cNvPr id="5" name="Rectangle 4">
+            <a:extLst>
+              <a:ext uri="{FF2B5EF4-FFF2-40B4-BE49-F238E27FC236}">
+                <a16:creationId xmlns:a16="http://schemas.microsoft.com/office/drawing/2014/main" id="{E0335EE0-31F5-4CF7-848D-8E3F698AD022}"/>
+              </a:ext>
+            </a:extLst>
+          </p:cNvPr>
+          <p:cNvSpPr/>
+          <p:nvPr/>
+        </p:nvSpPr>
+        <p:spPr>
+          <a:xfrm>
+            <a:off x="730469" y="2708562"/>
+            <a:ext cx="7357241" cy="369332"/>
+          </a:xfrm>
+          <a:prstGeom prst="rect">
+            <a:avLst/>
+          </a:prstGeom>
+        </p:spPr>
+        <p:txBody>
+          <a:bodyPr wrap="square">
+            <a:spAutoFit/>
+          </a:bodyPr>
+          <a:lstStyle/>
+          <a:p>
+            <a:r>
+              <a:rPr lang="en-US" dirty="0"/>
+              <a:t>programs run in a text-based environment called the console or terminal.</a:t>
+            </a:r>
+          </a:p>
+        </p:txBody>
+      </p:sp>
     </p:spTree>
     <p:extLst>
       <p:ext uri="{BB962C8B-B14F-4D97-AF65-F5344CB8AC3E}">
         <p14:creationId xmlns:p14="http://schemas.microsoft.com/office/powerpoint/2010/main" val="4044890053"/>
+      </p:ext>
+    </p:extLst>
+  </p:cSld>
+  <p:clrMapOvr>
+    <a:masterClrMapping/>
+  </p:clrMapOvr>
+</p:sld>
+</file>
+
+<file path=ppt/slides/slide6.xml><?xml version="1.0" encoding="utf-8"?>
+<p:sld xmlns:a="http://schemas.openxmlformats.org/drawingml/2006/main" xmlns:r="http://schemas.openxmlformats.org/officeDocument/2006/relationships" xmlns:p="http://schemas.openxmlformats.org/presentationml/2006/main">
+  <p:cSld>
+    <p:spTree>
+      <p:nvGrpSpPr>
+        <p:cNvPr id="1" name=""/>
+        <p:cNvGrpSpPr/>
+        <p:nvPr/>
+      </p:nvGrpSpPr>
+      <p:grpSpPr>
+        <a:xfrm>
+          <a:off x="0" y="0"/>
+          <a:ext cx="0" cy="0"/>
+          <a:chOff x="0" y="0"/>
+          <a:chExt cx="0" cy="0"/>
+        </a:xfrm>
+      </p:grpSpPr>
+      <p:pic>
+        <p:nvPicPr>
+          <p:cNvPr id="3" name="Image 2">
+            <a:extLst>
+              <a:ext uri="{FF2B5EF4-FFF2-40B4-BE49-F238E27FC236}">
+                <a16:creationId xmlns:a16="http://schemas.microsoft.com/office/drawing/2014/main" id="{B67A6F80-1ADD-44E6-A962-1D33EFEB716B}"/>
+              </a:ext>
+            </a:extLst>
+          </p:cNvPr>
+          <p:cNvPicPr>
+            <a:picLocks noChangeAspect="1"/>
+          </p:cNvPicPr>
+          <p:nvPr/>
+        </p:nvPicPr>
+        <p:blipFill>
+          <a:blip r:embed="rId2"/>
+          <a:stretch>
+            <a:fillRect/>
+          </a:stretch>
+        </p:blipFill>
+        <p:spPr>
+          <a:xfrm>
+            <a:off x="714375" y="0"/>
+            <a:ext cx="7715250" cy="5143500"/>
+          </a:xfrm>
+          <a:prstGeom prst="rect">
+            <a:avLst/>
+          </a:prstGeom>
+        </p:spPr>
+      </p:pic>
+    </p:spTree>
+    <p:extLst>
+      <p:ext uri="{BB962C8B-B14F-4D97-AF65-F5344CB8AC3E}">
+        <p14:creationId xmlns:p14="http://schemas.microsoft.com/office/powerpoint/2010/main" val="191560657"/>
+      </p:ext>
+    </p:extLst>
+  </p:cSld>
+  <p:clrMapOvr>
+    <a:masterClrMapping/>
+  </p:clrMapOvr>
+</p:sld>
+</file>
+
+<file path=ppt/slides/slide7.xml><?xml version="1.0" encoding="utf-8"?>
+<p:sld xmlns:a="http://schemas.openxmlformats.org/drawingml/2006/main" xmlns:r="http://schemas.openxmlformats.org/officeDocument/2006/relationships" xmlns:p="http://schemas.openxmlformats.org/presentationml/2006/main">
+  <p:cSld>
+    <p:spTree>
+      <p:nvGrpSpPr>
+        <p:cNvPr id="1" name=""/>
+        <p:cNvGrpSpPr/>
+        <p:nvPr/>
+      </p:nvGrpSpPr>
+      <p:grpSpPr>
+        <a:xfrm>
+          <a:off x="0" y="0"/>
+          <a:ext cx="0" cy="0"/>
+          <a:chOff x="0" y="0"/>
+          <a:chExt cx="0" cy="0"/>
+        </a:xfrm>
+      </p:grpSpPr>
+      <p:sp>
+        <p:nvSpPr>
+          <p:cNvPr id="2" name="Rectangle 1">
+            <a:extLst>
+              <a:ext uri="{FF2B5EF4-FFF2-40B4-BE49-F238E27FC236}">
+                <a16:creationId xmlns:a16="http://schemas.microsoft.com/office/drawing/2014/main" id="{2A6B9FFA-EFA7-4D6A-9F26-4C5E3E4DC343}"/>
+              </a:ext>
+            </a:extLst>
+          </p:cNvPr>
+          <p:cNvSpPr/>
+          <p:nvPr/>
+        </p:nvSpPr>
+        <p:spPr>
+          <a:xfrm>
+            <a:off x="853777" y="586591"/>
+            <a:ext cx="7249525" cy="3785652"/>
+          </a:xfrm>
+          <a:prstGeom prst="rect">
+            <a:avLst/>
+          </a:prstGeom>
+        </p:spPr>
+        <p:txBody>
+          <a:bodyPr wrap="square">
+            <a:spAutoFit/>
+          </a:bodyPr>
+          <a:lstStyle/>
+          <a:p>
+            <a:r>
+              <a:rPr lang="en-US" sz="2400" b="1" dirty="0"/>
+              <a:t>What is </a:t>
+            </a:r>
+            <a:r>
+              <a:rPr lang="en-US" sz="2400" b="1" dirty="0" err="1"/>
+              <a:t>Tkinter</a:t>
+            </a:r>
+            <a:r>
+              <a:rPr lang="en-US" sz="2400" b="1" dirty="0"/>
+              <a:t>?</a:t>
+            </a:r>
+          </a:p>
+          <a:p>
+            <a:r>
+              <a:rPr lang="en-US" b="1" dirty="0" err="1"/>
+              <a:t>Tkinter</a:t>
+            </a:r>
+            <a:r>
+              <a:rPr lang="en-US" dirty="0"/>
+              <a:t> is Python's standard library for creating </a:t>
+            </a:r>
+            <a:r>
+              <a:rPr lang="en-US" b="1" dirty="0"/>
+              <a:t>desktop GUI.</a:t>
+            </a:r>
+          </a:p>
+          <a:p>
+            <a:r>
+              <a:rPr lang="en-US" dirty="0"/>
+              <a:t>It allows us to build applications with:</a:t>
+            </a:r>
+          </a:p>
+          <a:p>
+            <a:pPr lvl="1">
+              <a:buFont typeface="Arial" panose="020B0604020202020204" pitchFamily="34" charset="0"/>
+              <a:buChar char="•"/>
+            </a:pPr>
+            <a:r>
+              <a:rPr lang="en-US" dirty="0"/>
+              <a:t>Windows </a:t>
+            </a:r>
+          </a:p>
+          <a:p>
+            <a:pPr lvl="1">
+              <a:buFont typeface="Arial" panose="020B0604020202020204" pitchFamily="34" charset="0"/>
+              <a:buChar char="•"/>
+            </a:pPr>
+            <a:r>
+              <a:rPr lang="en-US" dirty="0"/>
+              <a:t>Buttons </a:t>
+            </a:r>
+          </a:p>
+          <a:p>
+            <a:pPr lvl="1">
+              <a:buFont typeface="Arial" panose="020B0604020202020204" pitchFamily="34" charset="0"/>
+              <a:buChar char="•"/>
+            </a:pPr>
+            <a:r>
+              <a:rPr lang="en-US" dirty="0"/>
+              <a:t>Labels </a:t>
+            </a:r>
+          </a:p>
+          <a:p>
+            <a:pPr lvl="1">
+              <a:buFont typeface="Arial" panose="020B0604020202020204" pitchFamily="34" charset="0"/>
+              <a:buChar char="•"/>
+            </a:pPr>
+            <a:r>
+              <a:rPr lang="en-US" dirty="0"/>
+              <a:t>Menus </a:t>
+            </a:r>
+          </a:p>
+          <a:p>
+            <a:pPr lvl="1">
+              <a:buFont typeface="Arial" panose="020B0604020202020204" pitchFamily="34" charset="0"/>
+              <a:buChar char="•"/>
+            </a:pPr>
+            <a:r>
+              <a:rPr lang="en-US" dirty="0"/>
+              <a:t>Text boxes </a:t>
+            </a:r>
+          </a:p>
+          <a:p>
+            <a:pPr lvl="1">
+              <a:buFont typeface="Arial" panose="020B0604020202020204" pitchFamily="34" charset="0"/>
+              <a:buChar char="•"/>
+            </a:pPr>
+            <a:r>
+              <a:rPr lang="en-US" dirty="0"/>
+              <a:t>Images </a:t>
+            </a:r>
+          </a:p>
+          <a:p>
+            <a:pPr lvl="1">
+              <a:buFont typeface="Arial" panose="020B0604020202020204" pitchFamily="34" charset="0"/>
+              <a:buChar char="•"/>
+            </a:pPr>
+            <a:r>
+              <a:rPr lang="en-US" dirty="0"/>
+              <a:t>Tables </a:t>
+            </a:r>
+          </a:p>
+          <a:p>
+            <a:pPr lvl="1">
+              <a:buFont typeface="Arial" panose="020B0604020202020204" pitchFamily="34" charset="0"/>
+              <a:buChar char="•"/>
+            </a:pPr>
+            <a:r>
+              <a:rPr lang="en-US" dirty="0"/>
+              <a:t>Dialog boxes </a:t>
+            </a:r>
+          </a:p>
+          <a:p>
+            <a:r>
+              <a:rPr lang="en-US" dirty="0"/>
+              <a:t>without installing any extra packages (it is included with most Python installations).</a:t>
+            </a:r>
+          </a:p>
+        </p:txBody>
+      </p:sp>
+    </p:spTree>
+    <p:extLst>
+      <p:ext uri="{BB962C8B-B14F-4D97-AF65-F5344CB8AC3E}">
+        <p14:creationId xmlns:p14="http://schemas.microsoft.com/office/powerpoint/2010/main" val="1725735390"/>
+      </p:ext>
+    </p:extLst>
+  </p:cSld>
+  <p:clrMapOvr>
+    <a:masterClrMapping/>
+  </p:clrMapOvr>
+</p:sld>
+</file>
+
+<file path=ppt/slides/slide8.xml><?xml version="1.0" encoding="utf-8"?>
+<p:sld xmlns:a="http://schemas.openxmlformats.org/drawingml/2006/main" xmlns:r="http://schemas.openxmlformats.org/officeDocument/2006/relationships" xmlns:p="http://schemas.openxmlformats.org/presentationml/2006/main">
+  <p:cSld>
+    <p:spTree>
+      <p:nvGrpSpPr>
+        <p:cNvPr id="1" name=""/>
+        <p:cNvGrpSpPr/>
+        <p:nvPr/>
+      </p:nvGrpSpPr>
+      <p:grpSpPr>
+        <a:xfrm>
+          <a:off x="0" y="0"/>
+          <a:ext cx="0" cy="0"/>
+          <a:chOff x="0" y="0"/>
+          <a:chExt cx="0" cy="0"/>
+        </a:xfrm>
+      </p:grpSpPr>
+      <p:sp>
+        <p:nvSpPr>
+          <p:cNvPr id="2" name="Rectangle 1">
+            <a:extLst>
+              <a:ext uri="{FF2B5EF4-FFF2-40B4-BE49-F238E27FC236}">
+                <a16:creationId xmlns:a16="http://schemas.microsoft.com/office/drawing/2014/main" id="{C00381E3-FDA9-4EA9-8535-0D7523BD2DD2}"/>
+              </a:ext>
+            </a:extLst>
+          </p:cNvPr>
+          <p:cNvSpPr/>
+          <p:nvPr/>
+        </p:nvSpPr>
+        <p:spPr>
+          <a:xfrm>
+            <a:off x="919450" y="719564"/>
+            <a:ext cx="6794851" cy="369332"/>
+          </a:xfrm>
+          <a:prstGeom prst="rect">
+            <a:avLst/>
+          </a:prstGeom>
+        </p:spPr>
+        <p:txBody>
+          <a:bodyPr wrap="square">
+            <a:spAutoFit/>
+          </a:bodyPr>
+          <a:lstStyle/>
+          <a:p>
+            <a:r>
+              <a:rPr lang="en-US" dirty="0"/>
+              <a:t>FIRST CODE TKINTER </a:t>
+            </a:r>
+          </a:p>
+        </p:txBody>
+      </p:sp>
+      <p:pic>
+        <p:nvPicPr>
+          <p:cNvPr id="3" name="Image 2">
+            <a:extLst>
+              <a:ext uri="{FF2B5EF4-FFF2-40B4-BE49-F238E27FC236}">
+                <a16:creationId xmlns:a16="http://schemas.microsoft.com/office/drawing/2014/main" id="{0B2C2F6D-3286-4ECB-8896-E8A4660BC65A}"/>
+              </a:ext>
+            </a:extLst>
+          </p:cNvPr>
+          <p:cNvPicPr>
+            <a:picLocks noChangeAspect="1"/>
+          </p:cNvPicPr>
+          <p:nvPr/>
+        </p:nvPicPr>
+        <p:blipFill>
+          <a:blip r:embed="rId2"/>
+          <a:stretch>
+            <a:fillRect/>
+          </a:stretch>
+        </p:blipFill>
+        <p:spPr>
+          <a:xfrm>
+            <a:off x="1386759" y="1330253"/>
+            <a:ext cx="4372492" cy="2482994"/>
+          </a:xfrm>
+          <a:prstGeom prst="rect">
+            <a:avLst/>
+          </a:prstGeom>
+          <a:ln>
+            <a:noFill/>
+          </a:ln>
+          <a:effectLst>
+            <a:outerShdw blurRad="292100" dist="139700" dir="2700000" algn="tl" rotWithShape="0">
+              <a:srgbClr val="333333">
+                <a:alpha val="65000"/>
+              </a:srgbClr>
+            </a:outerShdw>
+          </a:effectLst>
+        </p:spPr>
+      </p:pic>
+    </p:spTree>
+    <p:extLst>
+      <p:ext uri="{BB962C8B-B14F-4D97-AF65-F5344CB8AC3E}">
+        <p14:creationId xmlns:p14="http://schemas.microsoft.com/office/powerpoint/2010/main" val="2337067156"/>
       </p:ext>
     </p:extLst>
   </p:cSld>

--- a/level2/course1.pptx
+++ b/level2/course1.pptx
@@ -204,7 +204,7 @@
           <a:p>
             <a:fld id="{B157FD80-104E-477A-84DF-AAA7C9A1979B}" type="datetimeFigureOut">
               <a:rPr lang="en-ZA" smtClean="0"/>
-              <a:t>2026/07/11</a:t>
+              <a:t>2026/07/14</a:t>
             </a:fld>
             <a:endParaRPr lang="en-ZA"/>
           </a:p>
@@ -621,7 +621,7 @@
           <a:p>
             <a:fld id="{8353421B-4862-4D3A-B9AB-BA663EF3CA0D}" type="datetimeFigureOut">
               <a:rPr lang="en-ZA" smtClean="0"/>
-              <a:t>2026/07/11</a:t>
+              <a:t>2026/07/14</a:t>
             </a:fld>
             <a:endParaRPr lang="en-ZA"/>
           </a:p>
@@ -821,7 +821,7 @@
           <a:p>
             <a:fld id="{8353421B-4862-4D3A-B9AB-BA663EF3CA0D}" type="datetimeFigureOut">
               <a:rPr lang="en-ZA" smtClean="0"/>
-              <a:t>2026/07/11</a:t>
+              <a:t>2026/07/14</a:t>
             </a:fld>
             <a:endParaRPr lang="en-ZA"/>
           </a:p>
@@ -1031,7 +1031,7 @@
           <a:p>
             <a:fld id="{8353421B-4862-4D3A-B9AB-BA663EF3CA0D}" type="datetimeFigureOut">
               <a:rPr lang="en-ZA" smtClean="0"/>
-              <a:t>2026/07/11</a:t>
+              <a:t>2026/07/14</a:t>
             </a:fld>
             <a:endParaRPr lang="en-ZA"/>
           </a:p>
@@ -1512,7 +1512,7 @@
           <a:p>
             <a:fld id="{8353421B-4862-4D3A-B9AB-BA663EF3CA0D}" type="datetimeFigureOut">
               <a:rPr lang="en-ZA" smtClean="0"/>
-              <a:t>2026/07/11</a:t>
+              <a:t>2026/07/14</a:t>
             </a:fld>
             <a:endParaRPr lang="en-ZA"/>
           </a:p>
@@ -1788,7 +1788,7 @@
           <a:p>
             <a:fld id="{8353421B-4862-4D3A-B9AB-BA663EF3CA0D}" type="datetimeFigureOut">
               <a:rPr lang="en-ZA" smtClean="0"/>
-              <a:t>2026/07/11</a:t>
+              <a:t>2026/07/14</a:t>
             </a:fld>
             <a:endParaRPr lang="en-ZA"/>
           </a:p>
@@ -2056,7 +2056,7 @@
           <a:p>
             <a:fld id="{8353421B-4862-4D3A-B9AB-BA663EF3CA0D}" type="datetimeFigureOut">
               <a:rPr lang="en-ZA" smtClean="0"/>
-              <a:t>2026/07/11</a:t>
+              <a:t>2026/07/14</a:t>
             </a:fld>
             <a:endParaRPr lang="en-ZA"/>
           </a:p>
@@ -2471,7 +2471,7 @@
           <a:p>
             <a:fld id="{8353421B-4862-4D3A-B9AB-BA663EF3CA0D}" type="datetimeFigureOut">
               <a:rPr lang="en-ZA" smtClean="0"/>
-              <a:t>2026/07/11</a:t>
+              <a:t>2026/07/14</a:t>
             </a:fld>
             <a:endParaRPr lang="en-ZA"/>
           </a:p>
@@ -2613,7 +2613,7 @@
           <a:p>
             <a:fld id="{8353421B-4862-4D3A-B9AB-BA663EF3CA0D}" type="datetimeFigureOut">
               <a:rPr lang="en-ZA" smtClean="0"/>
-              <a:t>2026/07/11</a:t>
+              <a:t>2026/07/14</a:t>
             </a:fld>
             <a:endParaRPr lang="en-ZA"/>
           </a:p>
@@ -2726,7 +2726,7 @@
           <a:p>
             <a:fld id="{8353421B-4862-4D3A-B9AB-BA663EF3CA0D}" type="datetimeFigureOut">
               <a:rPr lang="en-ZA" smtClean="0"/>
-              <a:t>2026/07/11</a:t>
+              <a:t>2026/07/14</a:t>
             </a:fld>
             <a:endParaRPr lang="en-ZA"/>
           </a:p>
@@ -3039,7 +3039,7 @@
           <a:p>
             <a:fld id="{8353421B-4862-4D3A-B9AB-BA663EF3CA0D}" type="datetimeFigureOut">
               <a:rPr lang="en-ZA" smtClean="0"/>
-              <a:t>2026/07/11</a:t>
+              <a:t>2026/07/14</a:t>
             </a:fld>
             <a:endParaRPr lang="en-ZA"/>
           </a:p>
@@ -3328,7 +3328,7 @@
           <a:p>
             <a:fld id="{8353421B-4862-4D3A-B9AB-BA663EF3CA0D}" type="datetimeFigureOut">
               <a:rPr lang="en-ZA" smtClean="0"/>
-              <a:t>2026/07/11</a:t>
+              <a:t>2026/07/14</a:t>
             </a:fld>
             <a:endParaRPr lang="en-ZA"/>
           </a:p>
@@ -3581,7 +3581,7 @@
           <a:p>
             <a:fld id="{8353421B-4862-4D3A-B9AB-BA663EF3CA0D}" type="datetimeFigureOut">
               <a:rPr lang="en-ZA" smtClean="0"/>
-              <a:t>2026/07/11</a:t>
+              <a:t>2026/07/14</a:t>
             </a:fld>
             <a:endParaRPr lang="en-ZA"/>
           </a:p>
@@ -4121,7 +4121,7 @@
         </p:blipFill>
         <p:spPr>
           <a:xfrm>
-            <a:off x="1553908" y="372165"/>
+            <a:off x="3640211" y="298592"/>
             <a:ext cx="3858919" cy="4399170"/>
           </a:xfrm>
           <a:prstGeom prst="rect">
